--- a/assets/безопасный интернет 1-4.pptx
+++ b/assets/безопасный интернет 1-4.pptx
@@ -27,14 +27,14 @@
   <p:notesSz cx="6858000" cy="9144000"/>
   <p:embeddedFontLst>
     <p:embeddedFont>
-      <p:font typeface="Overpass" panose="020B0604020202020204" charset="-52"/>
+      <p:font typeface="Overpass" charset="-52"/>
       <p:regular r:id="rId17"/>
       <p:bold r:id="rId18"/>
       <p:italic r:id="rId19"/>
       <p:boldItalic r:id="rId20"/>
     </p:embeddedFont>
     <p:embeddedFont>
-      <p:font typeface="Oxanium" panose="020B0604020202020204" charset="0"/>
+      <p:font typeface="Oxanium" charset="0"/>
       <p:regular r:id="rId21"/>
       <p:bold r:id="rId22"/>
     </p:embeddedFont>
@@ -270,7 +270,7 @@
   </p:defaultTextStyle>
   <p:extLst>
     <p:ext uri="{EFAFB233-063F-42B5-8137-9DF3F51BA10A}">
-      <p15:sldGuideLst xmlns:p15="http://schemas.microsoft.com/office/powerpoint/2012/main"/>
+      <p15:sldGuideLst xmlns:p15="http://schemas.microsoft.com/office/powerpoint/2012/main" xmlns=""/>
     </p:ext>
   </p:extLst>
 </p:presentation>
@@ -483,6 +483,11 @@
         </p:txBody>
       </p:sp>
     </p:spTree>
+    <p:extLst>
+      <p:ext uri="{BB962C8B-B14F-4D97-AF65-F5344CB8AC3E}">
+        <p14:creationId xmlns:p14="http://schemas.microsoft.com/office/powerpoint/2010/main" val="169929107"/>
+      </p:ext>
+    </p:extLst>
   </p:cSld>
   <p:clrMap bg1="lt1" tx1="dk1" bg2="dk2" tx2="lt2" accent1="accent1" accent2="accent2" accent3="accent3" accent4="accent4" accent5="accent5" accent6="accent6" hlink="hlink" folHlink="folHlink"/>
   <p:notesStyle>
@@ -32353,6 +32358,47 @@
           </p:sp>
         </p:grpSp>
       </p:grpSp>
+      <p:pic>
+        <p:nvPicPr>
+          <p:cNvPr id="1026" name="Picture 2" descr="D:\Арсений\проекты\сайт\logo (1).png"/>
+          <p:cNvPicPr>
+            <a:picLocks noChangeAspect="1" noChangeArrowheads="1"/>
+          </p:cNvPicPr>
+          <p:nvPr/>
+        </p:nvPicPr>
+        <p:blipFill>
+          <a:blip r:embed="rId3">
+            <a:extLst>
+              <a:ext uri="{28A0092B-C50C-407E-A947-70E740481C1C}">
+                <a14:useLocalDpi xmlns:a14="http://schemas.microsoft.com/office/drawing/2010/main" val="0"/>
+              </a:ext>
+            </a:extLst>
+          </a:blip>
+          <a:srcRect/>
+          <a:stretch>
+            <a:fillRect/>
+          </a:stretch>
+        </p:blipFill>
+        <p:spPr bwMode="auto">
+          <a:xfrm>
+            <a:off x="7662078" y="0"/>
+            <a:ext cx="1472978" cy="1325211"/>
+          </a:xfrm>
+          <a:prstGeom prst="rect">
+            <a:avLst/>
+          </a:prstGeom>
+          <a:noFill/>
+          <a:extLst>
+            <a:ext uri="{909E8E84-426E-40DD-AFC4-6F175D3DCCD1}">
+              <a14:hiddenFill xmlns:a14="http://schemas.microsoft.com/office/drawing/2010/main">
+                <a:solidFill>
+                  <a:srgbClr val="FFFFFF"/>
+                </a:solidFill>
+              </a14:hiddenFill>
+            </a:ext>
+          </a:extLst>
+        </p:spPr>
+      </p:pic>
     </p:spTree>
   </p:cSld>
   <p:clrMapOvr>
@@ -33518,7 +33564,7 @@
                 <a:hlinkClick r:id="rId3">
                   <a:extLst>
                     <a:ext uri="{A12FA001-AC4F-418D-AE19-62706E023703}">
-                      <ahyp:hlinkClr xmlns:ahyp="http://schemas.microsoft.com/office/drawing/2018/hyperlinkcolor" val="tx"/>
+                      <ahyp:hlinkClr xmlns:ahyp="http://schemas.microsoft.com/office/drawing/2018/hyperlinkcolor" xmlns="" val="tx"/>
                     </a:ext>
                   </a:extLst>
                 </a:hlinkClick>
@@ -33570,7 +33616,7 @@
                 <a:hlinkClick r:id="rId4">
                   <a:extLst>
                     <a:ext uri="{A12FA001-AC4F-418D-AE19-62706E023703}">
-                      <ahyp:hlinkClr xmlns:ahyp="http://schemas.microsoft.com/office/drawing/2018/hyperlinkcolor" val="tx"/>
+                      <ahyp:hlinkClr xmlns:ahyp="http://schemas.microsoft.com/office/drawing/2018/hyperlinkcolor" xmlns="" val="tx"/>
                     </a:ext>
                   </a:extLst>
                 </a:hlinkClick>
@@ -33596,7 +33642,7 @@
                 <a:hlinkClick r:id="rId5">
                   <a:extLst>
                     <a:ext uri="{A12FA001-AC4F-418D-AE19-62706E023703}">
-                      <ahyp:hlinkClr xmlns:ahyp="http://schemas.microsoft.com/office/drawing/2018/hyperlinkcolor" val="tx"/>
+                      <ahyp:hlinkClr xmlns:ahyp="http://schemas.microsoft.com/office/drawing/2018/hyperlinkcolor" xmlns="" val="tx"/>
                     </a:ext>
                   </a:extLst>
                 </a:hlinkClick>
@@ -33647,7 +33693,7 @@
                 <a:hlinkClick r:id="" action="ppaction://noaction">
                   <a:extLst>
                     <a:ext uri="{A12FA001-AC4F-418D-AE19-62706E023703}">
-                      <ahyp:hlinkClr xmlns:ahyp="http://schemas.microsoft.com/office/drawing/2018/hyperlinkcolor" val="tx"/>
+                      <ahyp:hlinkClr xmlns:ahyp="http://schemas.microsoft.com/office/drawing/2018/hyperlinkcolor" xmlns="" val="tx"/>
                     </a:ext>
                   </a:extLst>
                 </a:hlinkClick>
@@ -33690,7 +33736,7 @@
                 <a:hlinkClick r:id="" action="ppaction://noaction">
                   <a:extLst>
                     <a:ext uri="{A12FA001-AC4F-418D-AE19-62706E023703}">
-                      <ahyp:hlinkClr xmlns:ahyp="http://schemas.microsoft.com/office/drawing/2018/hyperlinkcolor" val="tx"/>
+                      <ahyp:hlinkClr xmlns:ahyp="http://schemas.microsoft.com/office/drawing/2018/hyperlinkcolor" xmlns="" val="tx"/>
                     </a:ext>
                   </a:extLst>
                 </a:hlinkClick>
@@ -33741,7 +33787,7 @@
                 <a:hlinkClick r:id="" action="ppaction://noaction">
                   <a:extLst>
                     <a:ext uri="{A12FA001-AC4F-418D-AE19-62706E023703}">
-                      <ahyp:hlinkClr xmlns:ahyp="http://schemas.microsoft.com/office/drawing/2018/hyperlinkcolor" val="tx"/>
+                      <ahyp:hlinkClr xmlns:ahyp="http://schemas.microsoft.com/office/drawing/2018/hyperlinkcolor" xmlns="" val="tx"/>
                     </a:ext>
                   </a:extLst>
                 </a:hlinkClick>
@@ -33787,7 +33833,7 @@
                 <a:hlinkClick r:id="" action="ppaction://noaction">
                   <a:extLst>
                     <a:ext uri="{A12FA001-AC4F-418D-AE19-62706E023703}">
-                      <ahyp:hlinkClr xmlns:ahyp="http://schemas.microsoft.com/office/drawing/2018/hyperlinkcolor" val="tx"/>
+                      <ahyp:hlinkClr xmlns:ahyp="http://schemas.microsoft.com/office/drawing/2018/hyperlinkcolor" xmlns="" val="tx"/>
                     </a:ext>
                   </a:extLst>
                 </a:hlinkClick>
@@ -33850,7 +33896,7 @@
                 <a:hlinkClick r:id="" action="ppaction://noaction">
                   <a:extLst>
                     <a:ext uri="{A12FA001-AC4F-418D-AE19-62706E023703}">
-                      <ahyp:hlinkClr xmlns:ahyp="http://schemas.microsoft.com/office/drawing/2018/hyperlinkcolor" val="tx"/>
+                      <ahyp:hlinkClr xmlns:ahyp="http://schemas.microsoft.com/office/drawing/2018/hyperlinkcolor" xmlns="" val="tx"/>
                     </a:ext>
                   </a:extLst>
                 </a:hlinkClick>
@@ -33893,7 +33939,7 @@
                 <a:hlinkClick r:id="" action="ppaction://noaction">
                   <a:extLst>
                     <a:ext uri="{A12FA001-AC4F-418D-AE19-62706E023703}">
-                      <ahyp:hlinkClr xmlns:ahyp="http://schemas.microsoft.com/office/drawing/2018/hyperlinkcolor" val="tx"/>
+                      <ahyp:hlinkClr xmlns:ahyp="http://schemas.microsoft.com/office/drawing/2018/hyperlinkcolor" xmlns="" val="tx"/>
                     </a:ext>
                   </a:extLst>
                 </a:hlinkClick>
@@ -33923,7 +33969,7 @@
                 <a:hlinkClick r:id="rId6">
                   <a:extLst>
                     <a:ext uri="{A12FA001-AC4F-418D-AE19-62706E023703}">
-                      <ahyp:hlinkClr xmlns:ahyp="http://schemas.microsoft.com/office/drawing/2018/hyperlinkcolor" val="tx"/>
+                      <ahyp:hlinkClr xmlns:ahyp="http://schemas.microsoft.com/office/drawing/2018/hyperlinkcolor" xmlns="" val="tx"/>
                     </a:ext>
                   </a:extLst>
                 </a:hlinkClick>
@@ -33970,7 +34016,7 @@
                 <a:hlinkClick r:id="" action="ppaction://noaction">
                   <a:extLst>
                     <a:ext uri="{A12FA001-AC4F-418D-AE19-62706E023703}">
-                      <ahyp:hlinkClr xmlns:ahyp="http://schemas.microsoft.com/office/drawing/2018/hyperlinkcolor" val="tx"/>
+                      <ahyp:hlinkClr xmlns:ahyp="http://schemas.microsoft.com/office/drawing/2018/hyperlinkcolor" xmlns="" val="tx"/>
                     </a:ext>
                   </a:extLst>
                 </a:hlinkClick>
@@ -34025,7 +34071,7 @@
                 <a:hlinkClick r:id="" action="ppaction://noaction">
                   <a:extLst>
                     <a:ext uri="{A12FA001-AC4F-418D-AE19-62706E023703}">
-                      <ahyp:hlinkClr xmlns:ahyp="http://schemas.microsoft.com/office/drawing/2018/hyperlinkcolor" val="tx"/>
+                      <ahyp:hlinkClr xmlns:ahyp="http://schemas.microsoft.com/office/drawing/2018/hyperlinkcolor" xmlns="" val="tx"/>
                     </a:ext>
                   </a:extLst>
                 </a:hlinkClick>
@@ -34965,7 +35011,7 @@
           <p:cNvPr id="2" name="Прямоугольник 1">
             <a:extLst>
               <a:ext uri="{FF2B5EF4-FFF2-40B4-BE49-F238E27FC236}">
-                <a16:creationId xmlns:a16="http://schemas.microsoft.com/office/drawing/2014/main" id="{C6C6C851-7B65-4A63-8866-CACECFC9250E}"/>
+                <a16:creationId xmlns:a16="http://schemas.microsoft.com/office/drawing/2014/main" xmlns="" id="{C6C6C851-7B65-4A63-8866-CACECFC9250E}"/>
               </a:ext>
             </a:extLst>
           </p:cNvPr>
@@ -35008,7 +35054,7 @@
           <p:cNvPr id="3" name="Прямоугольник 2">
             <a:extLst>
               <a:ext uri="{FF2B5EF4-FFF2-40B4-BE49-F238E27FC236}">
-                <a16:creationId xmlns:a16="http://schemas.microsoft.com/office/drawing/2014/main" id="{D89C71BF-E09D-4F7B-B3E2-D9300515AE1C}"/>
+                <a16:creationId xmlns:a16="http://schemas.microsoft.com/office/drawing/2014/main" xmlns="" id="{D89C71BF-E09D-4F7B-B3E2-D9300515AE1C}"/>
               </a:ext>
             </a:extLst>
           </p:cNvPr>
@@ -35046,7 +35092,7 @@
           <p:cNvPr id="4" name="Прямоугольник 3">
             <a:extLst>
               <a:ext uri="{FF2B5EF4-FFF2-40B4-BE49-F238E27FC236}">
-                <a16:creationId xmlns:a16="http://schemas.microsoft.com/office/drawing/2014/main" id="{549A6C97-1E2B-414F-881D-4D7930A8F478}"/>
+                <a16:creationId xmlns:a16="http://schemas.microsoft.com/office/drawing/2014/main" xmlns="" id="{549A6C97-1E2B-414F-881D-4D7930A8F478}"/>
               </a:ext>
             </a:extLst>
           </p:cNvPr>
@@ -35084,7 +35130,7 @@
           <p:cNvPr id="5" name="Прямоугольник 4">
             <a:extLst>
               <a:ext uri="{FF2B5EF4-FFF2-40B4-BE49-F238E27FC236}">
-                <a16:creationId xmlns:a16="http://schemas.microsoft.com/office/drawing/2014/main" id="{CF6E785C-27E1-488C-A152-173E52390900}"/>
+                <a16:creationId xmlns:a16="http://schemas.microsoft.com/office/drawing/2014/main" xmlns="" id="{CF6E785C-27E1-488C-A152-173E52390900}"/>
               </a:ext>
             </a:extLst>
           </p:cNvPr>
